--- a/M23B23 042 B21303 Deep Learning Final exam Presentation April 2026.pptx
+++ b/M23B23 042 B21303 Deep Learning Final exam Presentation April 2026.pptx
@@ -3369,6 +3369,8 @@
                 <a:solidFill>
                   <a:srgbClr val="C00000"/>
                 </a:solidFill>
+                <a:latin typeface="Times New Roman" panose="02020603050405020304" pitchFamily="18" charset="0"/>
+                <a:cs typeface="Times New Roman" panose="02020603050405020304" pitchFamily="18" charset="0"/>
               </a:rPr>
               <a:t>CIFAR-10 Image Classification using CNN</a:t>
             </a:r>
@@ -3377,12 +3379,16 @@
                 <a:solidFill>
                   <a:srgbClr val="C00000"/>
                 </a:solidFill>
+                <a:latin typeface="Times New Roman" panose="02020603050405020304" pitchFamily="18" charset="0"/>
+                <a:cs typeface="Times New Roman" panose="02020603050405020304" pitchFamily="18" charset="0"/>
               </a:rPr>
             </a:br>
             <a:endParaRPr lang="en-US" b="1" dirty="0">
               <a:solidFill>
                 <a:srgbClr val="C00000"/>
               </a:solidFill>
+              <a:latin typeface="Times New Roman" panose="02020603050405020304" pitchFamily="18" charset="0"/>
+              <a:cs typeface="Times New Roman" panose="02020603050405020304" pitchFamily="18" charset="0"/>
             </a:endParaRPr>
           </a:p>
         </p:txBody>
@@ -3496,6 +3502,8 @@
                 <a:solidFill>
                   <a:srgbClr val="C00000"/>
                 </a:solidFill>
+                <a:latin typeface="Times New Roman" panose="02020603050405020304" pitchFamily="18" charset="0"/>
+                <a:cs typeface="Times New Roman" panose="02020603050405020304" pitchFamily="18" charset="0"/>
               </a:rPr>
               <a:t>Conclusion</a:t>
             </a:r>
@@ -3503,6 +3511,8 @@
               <a:solidFill>
                 <a:srgbClr val="C00000"/>
               </a:solidFill>
+              <a:latin typeface="Times New Roman" panose="02020603050405020304" pitchFamily="18" charset="0"/>
+              <a:cs typeface="Times New Roman" panose="02020603050405020304" pitchFamily="18" charset="0"/>
             </a:endParaRPr>
           </a:p>
         </p:txBody>
@@ -3613,6 +3623,8 @@
                 <a:solidFill>
                   <a:srgbClr val="C00000"/>
                 </a:solidFill>
+                <a:latin typeface="Times New Roman" panose="02020603050405020304" pitchFamily="18" charset="0"/>
+                <a:cs typeface="Times New Roman" panose="02020603050405020304" pitchFamily="18" charset="0"/>
               </a:rPr>
               <a:t>Problem Statement</a:t>
             </a:r>
@@ -3671,6 +3683,36 @@
           </a:p>
         </p:txBody>
       </p:sp>
+      <p:pic>
+        <p:nvPicPr>
+          <p:cNvPr id="5" name="Picture 4">
+            <a:extLst>
+              <a:ext uri="{FF2B5EF4-FFF2-40B4-BE49-F238E27FC236}">
+                <a16:creationId xmlns:a16="http://schemas.microsoft.com/office/drawing/2014/main" id="{C912F9E3-2249-F71E-C8DA-E07600E12541}"/>
+              </a:ext>
+            </a:extLst>
+          </p:cNvPr>
+          <p:cNvPicPr>
+            <a:picLocks noChangeAspect="1"/>
+          </p:cNvPicPr>
+          <p:nvPr/>
+        </p:nvPicPr>
+        <p:blipFill>
+          <a:blip r:embed="rId2"/>
+          <a:stretch>
+            <a:fillRect/>
+          </a:stretch>
+        </p:blipFill>
+        <p:spPr>
+          <a:xfrm>
+            <a:off x="2778035" y="3918857"/>
+            <a:ext cx="6200502" cy="2856412"/>
+          </a:xfrm>
+          <a:prstGeom prst="rect">
+            <a:avLst/>
+          </a:prstGeom>
+        </p:spPr>
+      </p:pic>
     </p:spTree>
     <p:extLst>
       <p:ext uri="{BB962C8B-B14F-4D97-AF65-F5344CB8AC3E}">
@@ -3728,6 +3770,8 @@
                 <a:solidFill>
                   <a:srgbClr val="C00000"/>
                 </a:solidFill>
+                <a:latin typeface="Times New Roman" panose="02020603050405020304" pitchFamily="18" charset="0"/>
+                <a:cs typeface="Times New Roman" panose="02020603050405020304" pitchFamily="18" charset="0"/>
               </a:rPr>
               <a:t>Dataset</a:t>
             </a:r>
@@ -3788,40 +3832,17 @@
             </a:r>
           </a:p>
           <a:p>
-            <a:endParaRPr lang="en-US" dirty="0"/>
-          </a:p>
-        </p:txBody>
-      </p:sp>
-      <p:pic>
-        <p:nvPicPr>
-          <p:cNvPr id="5" name="Picture 4">
-            <a:extLst>
-              <a:ext uri="{FF2B5EF4-FFF2-40B4-BE49-F238E27FC236}">
-                <a16:creationId xmlns:a16="http://schemas.microsoft.com/office/drawing/2014/main" id="{C912F9E3-2249-F71E-C8DA-E07600E12541}"/>
-              </a:ext>
-            </a:extLst>
-          </p:cNvPr>
-          <p:cNvPicPr>
-            <a:picLocks noChangeAspect="1"/>
-          </p:cNvPicPr>
-          <p:nvPr/>
-        </p:nvPicPr>
-        <p:blipFill>
-          <a:blip r:embed="rId2"/>
-          <a:stretch>
-            <a:fillRect/>
-          </a:stretch>
-        </p:blipFill>
-        <p:spPr>
-          <a:xfrm>
-            <a:off x="4667176" y="1825626"/>
-            <a:ext cx="5626355" cy="2387640"/>
-          </a:xfrm>
-          <a:prstGeom prst="rect">
-            <a:avLst/>
-          </a:prstGeom>
-        </p:spPr>
-      </p:pic>
+            <a:pPr>
+              <a:buFont typeface="Wingdings" panose="05000000000000000000" pitchFamily="2" charset="2"/>
+              <a:buChar char="Ø"/>
+            </a:pPr>
+            <a:r>
+              <a:rPr lang="en-US" sz="2400" dirty="0"/>
+              <a:t>This dataset provides the CIFAR-10 image dataset, a widely used benchmark for image classification tasks. It contains 60,000 32x32 color images belonging to 10 different classes, with 6,000 images per class.</a:t>
+            </a:r>
+          </a:p>
+        </p:txBody>
+      </p:sp>
     </p:spTree>
     <p:extLst>
       <p:ext uri="{BB962C8B-B14F-4D97-AF65-F5344CB8AC3E}">
@@ -3879,6 +3900,8 @@
                 <a:solidFill>
                   <a:srgbClr val="C00000"/>
                 </a:solidFill>
+                <a:latin typeface="Times New Roman" panose="02020603050405020304" pitchFamily="18" charset="0"/>
+                <a:cs typeface="Times New Roman" panose="02020603050405020304" pitchFamily="18" charset="0"/>
               </a:rPr>
               <a:t>Data Preparation</a:t>
             </a:r>
@@ -3886,6 +3909,8 @@
               <a:solidFill>
                 <a:srgbClr val="C00000"/>
               </a:solidFill>
+              <a:latin typeface="Times New Roman" panose="02020603050405020304" pitchFamily="18" charset="0"/>
+              <a:cs typeface="Times New Roman" panose="02020603050405020304" pitchFamily="18" charset="0"/>
             </a:endParaRPr>
           </a:p>
         </p:txBody>
@@ -4028,6 +4053,8 @@
                 <a:solidFill>
                   <a:srgbClr val="C00000"/>
                 </a:solidFill>
+                <a:latin typeface="Times New Roman" panose="02020603050405020304" pitchFamily="18" charset="0"/>
+                <a:cs typeface="Times New Roman" panose="02020603050405020304" pitchFamily="18" charset="0"/>
               </a:rPr>
               <a:t>Model Architecture</a:t>
             </a:r>
@@ -4035,6 +4062,8 @@
               <a:solidFill>
                 <a:srgbClr val="C00000"/>
               </a:solidFill>
+              <a:latin typeface="Times New Roman" panose="02020603050405020304" pitchFamily="18" charset="0"/>
+              <a:cs typeface="Times New Roman" panose="02020603050405020304" pitchFamily="18" charset="0"/>
             </a:endParaRPr>
           </a:p>
         </p:txBody>
@@ -4226,6 +4255,8 @@
                 <a:solidFill>
                   <a:srgbClr val="C00000"/>
                 </a:solidFill>
+                <a:latin typeface="Times New Roman" panose="02020603050405020304" pitchFamily="18" charset="0"/>
+                <a:cs typeface="Times New Roman" panose="02020603050405020304" pitchFamily="18" charset="0"/>
               </a:rPr>
               <a:t>Training Setup</a:t>
             </a:r>
@@ -4233,6 +4264,8 @@
               <a:solidFill>
                 <a:srgbClr val="C00000"/>
               </a:solidFill>
+              <a:latin typeface="Times New Roman" panose="02020603050405020304" pitchFamily="18" charset="0"/>
+              <a:cs typeface="Times New Roman" panose="02020603050405020304" pitchFamily="18" charset="0"/>
             </a:endParaRPr>
           </a:p>
         </p:txBody>
@@ -4366,6 +4399,8 @@
                 <a:solidFill>
                   <a:srgbClr val="C00000"/>
                 </a:solidFill>
+                <a:latin typeface="Times New Roman" panose="02020603050405020304" pitchFamily="18" charset="0"/>
+                <a:cs typeface="Times New Roman" panose="02020603050405020304" pitchFamily="18" charset="0"/>
               </a:rPr>
               <a:t>Results</a:t>
             </a:r>
@@ -4373,6 +4408,8 @@
               <a:solidFill>
                 <a:srgbClr val="C00000"/>
               </a:solidFill>
+              <a:latin typeface="Times New Roman" panose="02020603050405020304" pitchFamily="18" charset="0"/>
+              <a:cs typeface="Times New Roman" panose="02020603050405020304" pitchFamily="18" charset="0"/>
             </a:endParaRPr>
           </a:p>
         </p:txBody>
@@ -4519,6 +4556,8 @@
                 <a:solidFill>
                   <a:srgbClr val="C00000"/>
                 </a:solidFill>
+                <a:latin typeface="Times New Roman" panose="02020603050405020304" pitchFamily="18" charset="0"/>
+                <a:cs typeface="Times New Roman" panose="02020603050405020304" pitchFamily="18" charset="0"/>
               </a:rPr>
               <a:t>Evaluation Results</a:t>
             </a:r>
@@ -4526,6 +4565,8 @@
               <a:solidFill>
                 <a:srgbClr val="C00000"/>
               </a:solidFill>
+              <a:latin typeface="Times New Roman" panose="02020603050405020304" pitchFamily="18" charset="0"/>
+              <a:cs typeface="Times New Roman" panose="02020603050405020304" pitchFamily="18" charset="0"/>
             </a:endParaRPr>
           </a:p>
         </p:txBody>
@@ -4688,6 +4729,8 @@
                 <a:solidFill>
                   <a:srgbClr val="C00000"/>
                 </a:solidFill>
+                <a:latin typeface="Times New Roman" panose="02020603050405020304" pitchFamily="18" charset="0"/>
+                <a:cs typeface="Times New Roman" panose="02020603050405020304" pitchFamily="18" charset="0"/>
               </a:rPr>
               <a:t>Analysis</a:t>
             </a:r>
@@ -4695,6 +4738,8 @@
               <a:solidFill>
                 <a:srgbClr val="C00000"/>
               </a:solidFill>
+              <a:latin typeface="Times New Roman" panose="02020603050405020304" pitchFamily="18" charset="0"/>
+              <a:cs typeface="Times New Roman" panose="02020603050405020304" pitchFamily="18" charset="0"/>
             </a:endParaRPr>
           </a:p>
         </p:txBody>
